--- a/CSRA_FS_Release_Status_Final.pptx
+++ b/CSRA_FS_Release_Status_Final.pptx
@@ -1269,7 +1269,7 @@
         </p:spPr>
         <p:txBody>
           <a:bodyPr wrap="square" lIns="0" tIns="0" rIns="0" bIns="0" anchor="ctr">
-            <a:normAutofit fontScale="85185" lnSpcReduction="20000"/>
+            <a:normAutofit fontScale="77685" lnSpcReduction="20000"/>
           </a:bodyPr>
           <a:lstStyle>
             <a:defPPr>
@@ -1484,7 +1484,7 @@
         </p:spPr>
         <p:txBody>
           <a:bodyPr wrap="square" lIns="0" tIns="0" rIns="0" bIns="0" anchor="ctr">
-            <a:normAutofit fontScale="85185" lnSpcReduction="20000"/>
+            <a:normAutofit fontScale="77685" lnSpcReduction="20000"/>
           </a:bodyPr>
           <a:lstStyle>
             <a:defPPr>
@@ -1699,7 +1699,7 @@
         </p:spPr>
         <p:txBody>
           <a:bodyPr wrap="square" lIns="0" tIns="0" rIns="0" bIns="0" anchor="ctr">
-            <a:normAutofit fontScale="85185" lnSpcReduction="20000"/>
+            <a:normAutofit fontScale="77685" lnSpcReduction="20000"/>
           </a:bodyPr>
           <a:lstStyle>
             <a:defPPr>
@@ -1914,7 +1914,7 @@
         </p:spPr>
         <p:txBody>
           <a:bodyPr wrap="square" lIns="0" tIns="0" rIns="0" bIns="0" anchor="ctr">
-            <a:normAutofit fontScale="85185" lnSpcReduction="20000"/>
+            <a:normAutofit fontScale="77685" lnSpcReduction="20000"/>
           </a:bodyPr>
           <a:lstStyle>
             <a:defPPr>
@@ -2886,7 +2886,7 @@
               <a:buNone/>
             </a:pPr>
             <a:r>
-              <a:rPr sz="900" b="1">
+              <a:rPr lang="en-US" sz="900" b="1" dirty="0">
                 <a:solidFill>
                   <a:srgbClr val="006B3F"/>
                 </a:solidFill>
@@ -2896,7 +2896,7 @@
               </a:rPr>
               <a:t>Development</a:t>
             </a:r>
-            <a:endParaRPr sz="900">
+            <a:endParaRPr sz="900" dirty="0">
               <a:latin typeface="Calibri"/>
               <a:ea typeface="Calibri"/>
               <a:cs typeface="Calibri"/>
@@ -3596,7 +3596,7 @@
               <a:buNone/>
             </a:pPr>
             <a:r>
-              <a:rPr sz="900" b="1">
+              <a:rPr lang="en-US" sz="900" b="1" dirty="0">
                 <a:solidFill>
                   <a:srgbClr val="8A5A00"/>
                 </a:solidFill>
@@ -3604,9 +3604,9 @@
                 <a:ea typeface="Calibri"/>
                 <a:cs typeface="Calibri"/>
               </a:rPr>
-              <a:t>In Progress</a:t>
+              <a:t>Waiting for review</a:t>
             </a:r>
-            <a:endParaRPr sz="900">
+            <a:endParaRPr sz="900" dirty="0">
               <a:latin typeface="Calibri"/>
               <a:ea typeface="Calibri"/>
               <a:cs typeface="Calibri"/>
@@ -3951,7 +3951,7 @@
               <a:buNone/>
             </a:pPr>
             <a:r>
-              <a:rPr sz="900" b="1">
+              <a:rPr lang="en-US" sz="900" b="1" dirty="0">
                 <a:solidFill>
                   <a:srgbClr val="006B3F"/>
                 </a:solidFill>
@@ -3959,9 +3959,9 @@
                 <a:ea typeface="Calibri"/>
                 <a:cs typeface="Calibri"/>
               </a:rPr>
-              <a:t>Dev Complete</a:t>
+              <a:t>Waiting for review</a:t>
             </a:r>
-            <a:endParaRPr sz="900">
+            <a:endParaRPr lang="en-US" sz="900" dirty="0">
               <a:latin typeface="Calibri"/>
               <a:ea typeface="Calibri"/>
               <a:cs typeface="Calibri"/>
@@ -5622,7 +5622,7 @@
           <p:nvPr>
             <p:extLst>
               <p:ext uri="{D42A27DB-BD31-4B8C-83A1-F6EECF244321}">
-                <p14:modId xmlns:p14="http://schemas.microsoft.com/office/powerpoint/2010/main" val="2316138234"/>
+                <p14:modId xmlns:p14="http://schemas.microsoft.com/office/powerpoint/2010/main" val="1737249863"/>
               </p:ext>
             </p:extLst>
           </p:nvPr>
@@ -6097,7 +6097,7 @@
                     <a:lstStyle/>
                     <a:p>
                       <a:r>
-                        <a:rPr sz="900" b="0">
+                        <a:rPr lang="en-US" sz="900" b="0" dirty="0">
                           <a:solidFill>
                             <a:srgbClr val="203C64"/>
                           </a:solidFill>
@@ -6105,8 +6105,16 @@
                           <a:ea typeface="Calibri" panose="020F0502020204030204" pitchFamily="34" charset="0"/>
                           <a:cs typeface="Calibri" panose="020F0502020204030204" pitchFamily="34" charset="0"/>
                         </a:rPr>
-                        <a:t>In Progress</a:t>
+                        <a:t>Completed</a:t>
                       </a:r>
+                      <a:endParaRPr sz="900" b="0" dirty="0">
+                        <a:solidFill>
+                          <a:srgbClr val="203C64"/>
+                        </a:solidFill>
+                        <a:latin typeface="Calibri" panose="020F0502020204030204" pitchFamily="34" charset="0"/>
+                        <a:ea typeface="Calibri" panose="020F0502020204030204" pitchFamily="34" charset="0"/>
+                        <a:cs typeface="Calibri" panose="020F0502020204030204" pitchFamily="34" charset="0"/>
+                      </a:endParaRPr>
                     </a:p>
                   </a:txBody>
                   <a:tcPr>
@@ -6994,7 +7002,7 @@
                     <a:lstStyle/>
                     <a:p>
                       <a:r>
-                        <a:rPr sz="900" b="0">
+                        <a:rPr sz="900" b="0" dirty="0">
                           <a:solidFill>
                             <a:srgbClr val="203C64"/>
                           </a:solidFill>
